--- a/presentations/MuleSoft-APIGateway-Architecture.pptx
+++ b/presentations/MuleSoft-APIGateway-Architecture.pptx
@@ -14,6 +14,7 @@
     <p:sldId id="262" r:id="rId13"/>
     <p:sldId id="263" r:id="rId14"/>
     <p:sldId id="264" r:id="rId15"/>
+    <p:sldId id="265" r:id="rId16"/>
   </p:sldIdLst>
   <p:sldSz cx="12191695" cy="6858000" type="screen4x3"/>
   <p:notesSz cx="6858000" cy="9144000"/>
@@ -3408,7 +3409,7 @@
 </p:sld>
 </file>
 
-<file path=ppt/slides/slide2.xml><?xml version="1.0" encoding="utf-8"?>
+<file path=ppt/slides/slide10.xml><?xml version="1.0" encoding="utf-8"?>
 <p:sld xmlns:a="http://schemas.openxmlformats.org/drawingml/2006/main" xmlns:p="http://schemas.openxmlformats.org/presentationml/2006/main" xmlns:r="http://schemas.openxmlformats.org/officeDocument/2006/relationships">
   <p:cSld>
     <p:spTree>
@@ -3491,6 +3492,613 @@
                 </a:solidFill>
                 <a:latin typeface="Calibri"/>
               </a:rPr>
+              <a:t>Risks &amp; next steps</a:t>
+            </a:r>
+          </a:p>
+        </p:txBody>
+      </p:sp>
+      <p:sp>
+        <p:nvSpPr>
+          <p:cNvPr id="4" name="TextBox 3"/>
+          <p:cNvSpPr txBox="1"/>
+          <p:nvPr/>
+        </p:nvSpPr>
+        <p:spPr>
+          <a:xfrm>
+            <a:off x="457200" y="841248"/>
+            <a:ext cx="11247120" cy="320040"/>
+          </a:xfrm>
+          <a:prstGeom prst="rect">
+            <a:avLst/>
+          </a:prstGeom>
+          <a:noFill/>
+        </p:spPr>
+        <p:txBody>
+          <a:bodyPr wrap="square" lIns="45720" rIns="45720" tIns="18288" bIns="18288" anchor="t">
+            <a:spAutoFit/>
+          </a:bodyPr>
+          <a:lstStyle/>
+          <a:p>
+            <a:pPr algn="l"/>
+            <a:r>
+              <a:rPr sz="1300" b="0">
+                <a:solidFill>
+                  <a:srgbClr val="2E75B6"/>
+                </a:solidFill>
+                <a:latin typeface="Calibri"/>
+              </a:rPr>
+              <a:t>What we still need to verify and how we get to go-live</a:t>
+            </a:r>
+          </a:p>
+        </p:txBody>
+      </p:sp>
+      <p:sp>
+        <p:nvSpPr>
+          <p:cNvPr id="5" name="TextBox 4"/>
+          <p:cNvSpPr txBox="1"/>
+          <p:nvPr/>
+        </p:nvSpPr>
+        <p:spPr>
+          <a:xfrm>
+            <a:off x="457200" y="1417320"/>
+            <a:ext cx="5486400" cy="365760"/>
+          </a:xfrm>
+          <a:prstGeom prst="rect">
+            <a:avLst/>
+          </a:prstGeom>
+          <a:noFill/>
+        </p:spPr>
+        <p:txBody>
+          <a:bodyPr wrap="square" lIns="45720" rIns="45720" tIns="18288" bIns="18288" anchor="t">
+            <a:spAutoFit/>
+          </a:bodyPr>
+          <a:lstStyle/>
+          <a:p>
+            <a:pPr algn="l"/>
+            <a:r>
+              <a:rPr sz="1600" b="1">
+                <a:solidFill>
+                  <a:srgbClr val="C0392B"/>
+                </a:solidFill>
+                <a:latin typeface="Calibri"/>
+              </a:rPr>
+              <a:t>Key risks</a:t>
+            </a:r>
+          </a:p>
+        </p:txBody>
+      </p:sp>
+      <p:sp>
+        <p:nvSpPr>
+          <p:cNvPr id="6" name="TextBox 5"/>
+          <p:cNvSpPr txBox="1"/>
+          <p:nvPr/>
+        </p:nvSpPr>
+        <p:spPr>
+          <a:xfrm>
+            <a:off x="457200" y="1783080"/>
+            <a:ext cx="5669280" cy="4572000"/>
+          </a:xfrm>
+          <a:prstGeom prst="rect">
+            <a:avLst/>
+          </a:prstGeom>
+          <a:noFill/>
+        </p:spPr>
+        <p:txBody>
+          <a:bodyPr wrap="square" lIns="45720" rIns="45720">
+            <a:spAutoFit/>
+          </a:bodyPr>
+          <a:lstStyle/>
+          <a:p>
+            <a:pPr algn="l">
+              <a:lnSpc>
+                <a:spcPct val="115000"/>
+              </a:lnSpc>
+              <a:spcAft>
+                <a:spcPts val="400"/>
+              </a:spcAft>
+            </a:pPr>
+            <a:r>
+              <a:rPr sz="1200">
+                <a:solidFill>
+                  <a:srgbClr val="333333"/>
+                </a:solidFill>
+                <a:latin typeface="Calibri"/>
+              </a:rPr>
+              <a:t>•  Citizen data residency &amp; compliance — requires DPA, possibly BAA, plus the full controls bundle (doc 07).</a:t>
+            </a:r>
+          </a:p>
+          <a:p>
+            <a:pPr algn="l">
+              <a:lnSpc>
+                <a:spcPct val="115000"/>
+              </a:lnSpc>
+              <a:spcAft>
+                <a:spcPts val="400"/>
+              </a:spcAft>
+            </a:pPr>
+            <a:r>
+              <a:rPr sz="1200">
+                <a:solidFill>
+                  <a:srgbClr val="333333"/>
+                </a:solidFill>
+                <a:latin typeface="Calibri"/>
+              </a:rPr>
+              <a:t>•  Azure Private Space feature parity vs AWS — confirm Security Edge, custom DLB, CMK with MuleSoft account team.</a:t>
+            </a:r>
+          </a:p>
+          <a:p>
+            <a:pPr algn="l">
+              <a:lnSpc>
+                <a:spcPct val="115000"/>
+              </a:lnSpc>
+              <a:spcAft>
+                <a:spcPts val="400"/>
+              </a:spcAft>
+            </a:pPr>
+            <a:r>
+              <a:rPr sz="1200">
+                <a:solidFill>
+                  <a:srgbClr val="333333"/>
+                </a:solidFill>
+                <a:latin typeface="Calibri"/>
+              </a:rPr>
+              <a:t>•  MuleSoft personnel privileged access — agree memory-dump policy (consent-based, named approvers).</a:t>
+            </a:r>
+          </a:p>
+          <a:p>
+            <a:pPr algn="l">
+              <a:lnSpc>
+                <a:spcPct val="115000"/>
+              </a:lnSpc>
+              <a:spcAft>
+                <a:spcPts val="400"/>
+              </a:spcAft>
+            </a:pPr>
+            <a:r>
+              <a:rPr sz="1200">
+                <a:solidFill>
+                  <a:srgbClr val="333333"/>
+                </a:solidFill>
+                <a:latin typeface="Calibri"/>
+              </a:rPr>
+              <a:t>•  Vendor lock-in — Anypoint policy format + WASM SDK are MuleSoft-specific.</a:t>
+            </a:r>
+          </a:p>
+          <a:p>
+            <a:pPr algn="l">
+              <a:lnSpc>
+                <a:spcPct val="115000"/>
+              </a:lnSpc>
+              <a:spcAft>
+                <a:spcPts val="400"/>
+              </a:spcAft>
+            </a:pPr>
+            <a:r>
+              <a:rPr sz="1200">
+                <a:solidFill>
+                  <a:srgbClr val="333333"/>
+                </a:solidFill>
+                <a:latin typeface="Calibri"/>
+              </a:rPr>
+              <a:t>•  Auto-scale latency on CH 2.0 ~1–2 min — mitigate with spike-control policy.</a:t>
+            </a:r>
+          </a:p>
+          <a:p>
+            <a:pPr algn="l">
+              <a:lnSpc>
+                <a:spcPct val="115000"/>
+              </a:lnSpc>
+              <a:spcAft>
+                <a:spcPts val="400"/>
+              </a:spcAft>
+            </a:pPr>
+            <a:r>
+              <a:rPr sz="1200">
+                <a:solidFill>
+                  <a:srgbClr val="333333"/>
+                </a:solidFill>
+                <a:latin typeface="Calibri"/>
+              </a:rPr>
+              <a:t>•  Talent: Flex Gateway specialists are scarcer than general MuleSoft developers — plan ramp-up.</a:t>
+            </a:r>
+          </a:p>
+        </p:txBody>
+      </p:sp>
+      <p:sp>
+        <p:nvSpPr>
+          <p:cNvPr id="7" name="TextBox 6"/>
+          <p:cNvSpPr txBox="1"/>
+          <p:nvPr/>
+        </p:nvSpPr>
+        <p:spPr>
+          <a:xfrm>
+            <a:off x="6400800" y="1417320"/>
+            <a:ext cx="5486400" cy="365760"/>
+          </a:xfrm>
+          <a:prstGeom prst="rect">
+            <a:avLst/>
+          </a:prstGeom>
+          <a:noFill/>
+        </p:spPr>
+        <p:txBody>
+          <a:bodyPr wrap="square" lIns="45720" rIns="45720" tIns="18288" bIns="18288" anchor="t">
+            <a:spAutoFit/>
+          </a:bodyPr>
+          <a:lstStyle/>
+          <a:p>
+            <a:pPr algn="l"/>
+            <a:r>
+              <a:rPr sz="1600" b="1">
+                <a:solidFill>
+                  <a:srgbClr val="339933"/>
+                </a:solidFill>
+                <a:latin typeface="Calibri"/>
+              </a:rPr>
+              <a:t>Next steps</a:t>
+            </a:r>
+          </a:p>
+        </p:txBody>
+      </p:sp>
+      <p:sp>
+        <p:nvSpPr>
+          <p:cNvPr id="8" name="TextBox 7"/>
+          <p:cNvSpPr txBox="1"/>
+          <p:nvPr/>
+        </p:nvSpPr>
+        <p:spPr>
+          <a:xfrm>
+            <a:off x="6400800" y="1783080"/>
+            <a:ext cx="5486400" cy="4572000"/>
+          </a:xfrm>
+          <a:prstGeom prst="rect">
+            <a:avLst/>
+          </a:prstGeom>
+          <a:noFill/>
+        </p:spPr>
+        <p:txBody>
+          <a:bodyPr wrap="square" lIns="45720" rIns="45720">
+            <a:spAutoFit/>
+          </a:bodyPr>
+          <a:lstStyle/>
+          <a:p>
+            <a:pPr algn="l">
+              <a:lnSpc>
+                <a:spcPct val="115000"/>
+              </a:lnSpc>
+              <a:spcAft>
+                <a:spcPts val="400"/>
+              </a:spcAft>
+            </a:pPr>
+            <a:r>
+              <a:rPr sz="1200">
+                <a:solidFill>
+                  <a:srgbClr val="333333"/>
+                </a:solidFill>
+                <a:latin typeface="Calibri"/>
+              </a:rPr>
+              <a:t>•  Engage MuleSoft account team — confirm centralus Private Space GA, feature matrix, pricing for our scale.</a:t>
+            </a:r>
+          </a:p>
+          <a:p>
+            <a:pPr algn="l">
+              <a:lnSpc>
+                <a:spcPct val="115000"/>
+              </a:lnSpc>
+              <a:spcAft>
+                <a:spcPts val="400"/>
+              </a:spcAft>
+            </a:pPr>
+            <a:r>
+              <a:rPr sz="1200">
+                <a:solidFill>
+                  <a:srgbClr val="333333"/>
+                </a:solidFill>
+                <a:latin typeface="Calibri"/>
+              </a:rPr>
+              <a:t>•  Open DPA / BAA conversation immediately — these are slow.</a:t>
+            </a:r>
+          </a:p>
+          <a:p>
+            <a:pPr algn="l">
+              <a:lnSpc>
+                <a:spcPct val="115000"/>
+              </a:lnSpc>
+              <a:spcAft>
+                <a:spcPts val="400"/>
+              </a:spcAft>
+            </a:pPr>
+            <a:r>
+              <a:rPr sz="1200">
+                <a:solidFill>
+                  <a:srgbClr val="333333"/>
+                </a:solidFill>
+                <a:latin typeface="Calibri"/>
+              </a:rPr>
+              <a:t>•  Pre-go-live security checklist (doc 07 §12) as tabletop with CISO / DPO.</a:t>
+            </a:r>
+          </a:p>
+          <a:p>
+            <a:pPr algn="l">
+              <a:lnSpc>
+                <a:spcPct val="115000"/>
+              </a:lnSpc>
+              <a:spcAft>
+                <a:spcPts val="400"/>
+              </a:spcAft>
+            </a:pPr>
+            <a:r>
+              <a:rPr sz="1200">
+                <a:solidFill>
+                  <a:srgbClr val="333333"/>
+                </a:solidFill>
+                <a:latin typeface="Calibri"/>
+              </a:rPr>
+              <a:t>•  Define IdP-side configuration with the IAM team — clients, scopes, claim shape.</a:t>
+            </a:r>
+          </a:p>
+          <a:p>
+            <a:pPr algn="l">
+              <a:lnSpc>
+                <a:spcPct val="115000"/>
+              </a:lnSpc>
+              <a:spcAft>
+                <a:spcPts val="400"/>
+              </a:spcAft>
+            </a:pPr>
+            <a:r>
+              <a:rPr sz="1200">
+                <a:solidFill>
+                  <a:srgbClr val="333333"/>
+                </a:solidFill>
+                <a:latin typeface="Calibri"/>
+              </a:rPr>
+              <a:t>•  Network team starts the ExpressRoute / Transit Gateway change request — 2–3 week lead time.</a:t>
+            </a:r>
+          </a:p>
+          <a:p>
+            <a:pPr algn="l">
+              <a:lnSpc>
+                <a:spcPct val="115000"/>
+              </a:lnSpc>
+              <a:spcAft>
+                <a:spcPts val="400"/>
+              </a:spcAft>
+            </a:pPr>
+            <a:r>
+              <a:rPr sz="1200">
+                <a:solidFill>
+                  <a:srgbClr val="333333"/>
+                </a:solidFill>
+                <a:latin typeface="Calibri"/>
+              </a:rPr>
+              <a:t>•  Stand up POC in a dev Private Space; validate one API end-to-end including private connectivity, mTLS, JWT.</a:t>
+            </a:r>
+          </a:p>
+          <a:p>
+            <a:pPr algn="l">
+              <a:lnSpc>
+                <a:spcPct val="115000"/>
+              </a:lnSpc>
+              <a:spcAft>
+                <a:spcPts val="400"/>
+              </a:spcAft>
+            </a:pPr>
+            <a:r>
+              <a:rPr sz="1200">
+                <a:solidFill>
+                  <a:srgbClr val="333333"/>
+                </a:solidFill>
+                <a:latin typeface="Calibri"/>
+              </a:rPr>
+              <a:t>•  Decide observability stack (Splunk + Datadog) and provision private endpoints into the Private Space.</a:t>
+            </a:r>
+          </a:p>
+        </p:txBody>
+      </p:sp>
+      <p:sp>
+        <p:nvSpPr>
+          <p:cNvPr id="9" name="Rectangle 8"/>
+          <p:cNvSpPr/>
+          <p:nvPr/>
+        </p:nvSpPr>
+        <p:spPr>
+          <a:xfrm>
+            <a:off x="0" y="6583680"/>
+            <a:ext cx="12191695" cy="274320"/>
+          </a:xfrm>
+          <a:prstGeom prst="rect">
+            <a:avLst/>
+          </a:prstGeom>
+          <a:solidFill>
+            <a:srgbClr val="F2F2F2"/>
+          </a:solidFill>
+          <a:ln>
+            <a:noFill/>
+          </a:ln>
+        </p:spPr>
+        <p:style>
+          <a:lnRef idx="1">
+            <a:schemeClr val="accent1"/>
+          </a:lnRef>
+          <a:fillRef idx="3">
+            <a:schemeClr val="accent1"/>
+          </a:fillRef>
+          <a:effectRef idx="2">
+            <a:schemeClr val="accent1"/>
+          </a:effectRef>
+          <a:fontRef idx="minor">
+            <a:schemeClr val="lt1"/>
+          </a:fontRef>
+        </p:style>
+        <p:txBody>
+          <a:bodyPr rtlCol="0" anchor="ctr"/>
+          <a:lstStyle/>
+          <a:p>
+            <a:pPr algn="ctr"/>
+          </a:p>
+        </p:txBody>
+      </p:sp>
+      <p:sp>
+        <p:nvSpPr>
+          <p:cNvPr id="10" name="TextBox 9"/>
+          <p:cNvSpPr txBox="1"/>
+          <p:nvPr/>
+        </p:nvSpPr>
+        <p:spPr>
+          <a:xfrm>
+            <a:off x="365760" y="6601968"/>
+            <a:ext cx="7315200" cy="256032"/>
+          </a:xfrm>
+          <a:prstGeom prst="rect">
+            <a:avLst/>
+          </a:prstGeom>
+          <a:noFill/>
+        </p:spPr>
+        <p:txBody>
+          <a:bodyPr wrap="square" lIns="45720" rIns="45720" tIns="18288" bIns="18288" anchor="ctr">
+            <a:spAutoFit/>
+          </a:bodyPr>
+          <a:lstStyle/>
+          <a:p>
+            <a:pPr algn="l"/>
+            <a:r>
+              <a:rPr sz="1000" b="0">
+                <a:solidFill>
+                  <a:srgbClr val="333333"/>
+                </a:solidFill>
+                <a:latin typeface="Calibri"/>
+              </a:rPr>
+              <a:t>MuleSoft API Gateway Architecture — Citizens-Data APIs</a:t>
+            </a:r>
+          </a:p>
+        </p:txBody>
+      </p:sp>
+      <p:sp>
+        <p:nvSpPr>
+          <p:cNvPr id="11" name="TextBox 10"/>
+          <p:cNvSpPr txBox="1"/>
+          <p:nvPr/>
+        </p:nvSpPr>
+        <p:spPr>
+          <a:xfrm>
+            <a:off x="10972800" y="6601968"/>
+            <a:ext cx="914400" cy="256032"/>
+          </a:xfrm>
+          <a:prstGeom prst="rect">
+            <a:avLst/>
+          </a:prstGeom>
+          <a:noFill/>
+        </p:spPr>
+        <p:txBody>
+          <a:bodyPr wrap="square" lIns="45720" rIns="45720" tIns="18288" bIns="18288" anchor="ctr">
+            <a:spAutoFit/>
+          </a:bodyPr>
+          <a:lstStyle/>
+          <a:p>
+            <a:pPr algn="r"/>
+            <a:r>
+              <a:rPr sz="1000" b="0">
+                <a:solidFill>
+                  <a:srgbClr val="333333"/>
+                </a:solidFill>
+                <a:latin typeface="Calibri"/>
+              </a:rPr>
+              <a:t>10 / 10</a:t>
+            </a:r>
+          </a:p>
+        </p:txBody>
+      </p:sp>
+    </p:spTree>
+  </p:cSld>
+  <p:clrMapOvr>
+    <a:masterClrMapping/>
+  </p:clrMapOvr>
+</p:sld>
+</file>
+
+<file path=ppt/slides/slide2.xml><?xml version="1.0" encoding="utf-8"?>
+<p:sld xmlns:a="http://schemas.openxmlformats.org/drawingml/2006/main" xmlns:p="http://schemas.openxmlformats.org/presentationml/2006/main" xmlns:r="http://schemas.openxmlformats.org/officeDocument/2006/relationships">
+  <p:cSld>
+    <p:spTree>
+      <p:nvGrpSpPr>
+        <p:cNvPr id="1" name=""/>
+        <p:cNvGrpSpPr/>
+        <p:nvPr/>
+      </p:nvGrpSpPr>
+      <p:grpSpPr/>
+      <p:sp>
+        <p:nvSpPr>
+          <p:cNvPr id="2" name="Rectangle 1"/>
+          <p:cNvSpPr/>
+          <p:nvPr/>
+        </p:nvSpPr>
+        <p:spPr>
+          <a:xfrm>
+            <a:off x="0" y="0"/>
+            <a:ext cx="12191695" cy="777240"/>
+          </a:xfrm>
+          <a:prstGeom prst="rect">
+            <a:avLst/>
+          </a:prstGeom>
+          <a:solidFill>
+            <a:srgbClr val="1F4E79"/>
+          </a:solidFill>
+          <a:ln>
+            <a:noFill/>
+          </a:ln>
+        </p:spPr>
+        <p:style>
+          <a:lnRef idx="1">
+            <a:schemeClr val="accent1"/>
+          </a:lnRef>
+          <a:fillRef idx="3">
+            <a:schemeClr val="accent1"/>
+          </a:fillRef>
+          <a:effectRef idx="2">
+            <a:schemeClr val="accent1"/>
+          </a:effectRef>
+          <a:fontRef idx="minor">
+            <a:schemeClr val="lt1"/>
+          </a:fontRef>
+        </p:style>
+        <p:txBody>
+          <a:bodyPr rtlCol="0" anchor="ctr"/>
+          <a:lstStyle/>
+          <a:p>
+            <a:pPr algn="ctr"/>
+          </a:p>
+        </p:txBody>
+      </p:sp>
+      <p:sp>
+        <p:nvSpPr>
+          <p:cNvPr id="3" name="TextBox 2"/>
+          <p:cNvSpPr txBox="1"/>
+          <p:nvPr/>
+        </p:nvSpPr>
+        <p:spPr>
+          <a:xfrm>
+            <a:off x="457200" y="137160"/>
+            <a:ext cx="11247120" cy="502920"/>
+          </a:xfrm>
+          <a:prstGeom prst="rect">
+            <a:avLst/>
+          </a:prstGeom>
+          <a:noFill/>
+        </p:spPr>
+        <p:txBody>
+          <a:bodyPr wrap="square" lIns="45720" rIns="45720" tIns="18288" bIns="18288" anchor="ctr">
+            <a:spAutoFit/>
+          </a:bodyPr>
+          <a:lstStyle/>
+          <a:p>
+            <a:pPr algn="l"/>
+            <a:r>
+              <a:rPr sz="2600" b="1">
+                <a:solidFill>
+                  <a:srgbClr val="FFFFFF"/>
+                </a:solidFill>
+                <a:latin typeface="Calibri"/>
+              </a:rPr>
               <a:t>Synopsis — Why we are doing this</a:t>
             </a:r>
           </a:p>
@@ -3873,7 +4481,7 @@
                 </a:solidFill>
                 <a:latin typeface="Calibri"/>
               </a:rPr>
-              <a:t>2 / 9</a:t>
+              <a:t>2 / 10</a:t>
             </a:r>
           </a:p>
         </p:txBody>
@@ -4375,7 +4983,7 @@
                 </a:solidFill>
                 <a:latin typeface="Calibri"/>
               </a:rPr>
-              <a:t>3 / 9</a:t>
+              <a:t>3 / 10</a:t>
             </a:r>
           </a:p>
         </p:txBody>
@@ -4869,7 +5477,7 @@
                 </a:solidFill>
                 <a:latin typeface="Calibri"/>
               </a:rPr>
-              <a:t>4 / 9</a:t>
+              <a:t>4 / 10</a:t>
             </a:r>
           </a:p>
         </p:txBody>
@@ -6063,7 +6671,7 @@
                 </a:solidFill>
                 <a:latin typeface="Calibri"/>
               </a:rPr>
-              <a:t>5 / 9</a:t>
+              <a:t>5 / 10</a:t>
             </a:r>
           </a:p>
         </p:txBody>
@@ -7257,7 +7865,7 @@
                 </a:solidFill>
                 <a:latin typeface="Calibri"/>
               </a:rPr>
-              <a:t>6 / 9</a:t>
+              <a:t>6 / 10</a:t>
             </a:r>
           </a:p>
         </p:txBody>
@@ -8818,7 +9426,7 @@
                 </a:solidFill>
                 <a:latin typeface="Calibri"/>
               </a:rPr>
-              <a:t>7 / 9</a:t>
+              <a:t>7 / 10</a:t>
             </a:r>
           </a:p>
         </p:txBody>
@@ -10012,7 +10620,7 @@
                 </a:solidFill>
                 <a:latin typeface="Calibri"/>
               </a:rPr>
-              <a:t>8 / 9</a:t>
+              <a:t>8 / 10</a:t>
             </a:r>
           </a:p>
         </p:txBody>
@@ -10108,7 +10716,7 @@
                 </a:solidFill>
                 <a:latin typeface="Calibri"/>
               </a:rPr>
-              <a:t>Risks &amp; next steps</a:t>
+              <a:t>On-prem deployment — when SaaS isn't viable</a:t>
             </a:r>
           </a:p>
         </p:txBody>
@@ -10143,7 +10751,7 @@
                 </a:solidFill>
                 <a:latin typeface="Calibri"/>
               </a:rPr>
-              <a:t>What we still need to verify and how we get to go-live</a:t>
+              <a:t>Same Flex Gateway binary, your data center, your operational responsibility</a:t>
             </a:r>
           </a:p>
         </p:txBody>
@@ -10156,8 +10764,8 @@
         </p:nvSpPr>
         <p:spPr>
           <a:xfrm>
-            <a:off x="457200" y="1417320"/>
-            <a:ext cx="5486400" cy="365760"/>
+            <a:off x="457200" y="1280160"/>
+            <a:ext cx="11338560" cy="685800"/>
           </a:xfrm>
           <a:prstGeom prst="rect">
             <a:avLst/>
@@ -10172,13 +10780,13 @@
           <a:p>
             <a:pPr algn="l"/>
             <a:r>
-              <a:rPr sz="1600" b="1">
+              <a:rPr sz="1200" b="0">
                 <a:solidFill>
-                  <a:srgbClr val="C0392B"/>
+                  <a:srgbClr val="333333"/>
                 </a:solidFill>
                 <a:latin typeface="Calibri"/>
               </a:rPr>
-              <a:t>Key risks</a:t>
+              <a:t>On-prem keeps every byte of citizen data inside your perimeter and removes MuleSoft personnel access from the data plane entirely. The trade-off is that you inherit all operational responsibility — patching, scaling, HA, monitoring, incident response — that the SaaS path would otherwise absorb.</a:t>
             </a:r>
           </a:p>
         </p:txBody>
@@ -10191,8 +10799,8 @@
         </p:nvSpPr>
         <p:spPr>
           <a:xfrm>
-            <a:off x="457200" y="1783080"/>
-            <a:ext cx="5669280" cy="4572000"/>
+            <a:off x="457200" y="2011680"/>
+            <a:ext cx="5486400" cy="320040"/>
           </a:xfrm>
           <a:prstGeom prst="rect">
             <a:avLst/>
@@ -10200,136 +10808,345 @@
           <a:noFill/>
         </p:spPr>
         <p:txBody>
-          <a:bodyPr wrap="square" lIns="45720" rIns="45720">
+          <a:bodyPr wrap="square" lIns="45720" rIns="45720" tIns="18288" bIns="18288" anchor="t">
             <a:spAutoFit/>
           </a:bodyPr>
           <a:lstStyle/>
           <a:p>
-            <a:pPr algn="l">
-              <a:lnSpc>
-                <a:spcPct val="115000"/>
-              </a:lnSpc>
-              <a:spcAft>
-                <a:spcPts val="400"/>
-              </a:spcAft>
-            </a:pPr>
-            <a:r>
-              <a:rPr sz="1200">
+            <a:pPr algn="l"/>
+            <a:r>
+              <a:rPr sz="1400" b="1">
                 <a:solidFill>
-                  <a:srgbClr val="333333"/>
+                  <a:srgbClr val="1F4E79"/>
                 </a:solidFill>
                 <a:latin typeface="Calibri"/>
               </a:rPr>
-              <a:t>•  Citizen data residency &amp; compliance — requires DPA, possibly BAA, plus the full controls bundle (doc 07).</a:t>
-            </a:r>
-          </a:p>
-          <a:p>
-            <a:pPr algn="l">
-              <a:lnSpc>
-                <a:spcPct val="115000"/>
-              </a:lnSpc>
-              <a:spcAft>
-                <a:spcPts val="400"/>
-              </a:spcAft>
-            </a:pPr>
-            <a:r>
-              <a:rPr sz="1200">
-                <a:solidFill>
-                  <a:srgbClr val="333333"/>
-                </a:solidFill>
-                <a:latin typeface="Calibri"/>
-              </a:rPr>
-              <a:t>•  Azure Private Space feature parity vs AWS — confirm Security Edge, custom DLB, CMK with MuleSoft account team.</a:t>
-            </a:r>
-          </a:p>
-          <a:p>
-            <a:pPr algn="l">
-              <a:lnSpc>
-                <a:spcPct val="115000"/>
-              </a:lnSpc>
-              <a:spcAft>
-                <a:spcPts val="400"/>
-              </a:spcAft>
-            </a:pPr>
-            <a:r>
-              <a:rPr sz="1200">
-                <a:solidFill>
-                  <a:srgbClr val="333333"/>
-                </a:solidFill>
-                <a:latin typeface="Calibri"/>
-              </a:rPr>
-              <a:t>•  MuleSoft personnel privileged access — agree memory-dump policy (consent-based, named approvers).</a:t>
-            </a:r>
-          </a:p>
-          <a:p>
-            <a:pPr algn="l">
-              <a:lnSpc>
-                <a:spcPct val="115000"/>
-              </a:lnSpc>
-              <a:spcAft>
-                <a:spcPts val="400"/>
-              </a:spcAft>
-            </a:pPr>
-            <a:r>
-              <a:rPr sz="1200">
-                <a:solidFill>
-                  <a:srgbClr val="333333"/>
-                </a:solidFill>
-                <a:latin typeface="Calibri"/>
-              </a:rPr>
-              <a:t>•  Vendor lock-in — Anypoint policy format + WASM SDK are MuleSoft-specific.</a:t>
-            </a:r>
-          </a:p>
-          <a:p>
-            <a:pPr algn="l">
-              <a:lnSpc>
-                <a:spcPct val="115000"/>
-              </a:lnSpc>
-              <a:spcAft>
-                <a:spcPts val="400"/>
-              </a:spcAft>
-            </a:pPr>
-            <a:r>
-              <a:rPr sz="1200">
-                <a:solidFill>
-                  <a:srgbClr val="333333"/>
-                </a:solidFill>
-                <a:latin typeface="Calibri"/>
-              </a:rPr>
-              <a:t>•  Auto-scale latency on CH 2.0 ~1–2 min — mitigate with spike-control policy.</a:t>
-            </a:r>
-          </a:p>
-          <a:p>
-            <a:pPr algn="l">
-              <a:lnSpc>
-                <a:spcPct val="115000"/>
-              </a:lnSpc>
-              <a:spcAft>
-                <a:spcPts val="400"/>
-              </a:spcAft>
-            </a:pPr>
-            <a:r>
-              <a:rPr sz="1200">
-                <a:solidFill>
-                  <a:srgbClr val="333333"/>
-                </a:solidFill>
-                <a:latin typeface="Calibri"/>
-              </a:rPr>
-              <a:t>•  Talent: Flex Gateway specialists are scarcer than general MuleSoft developers — plan ramp-up.</a:t>
-            </a:r>
-          </a:p>
-        </p:txBody>
-      </p:sp>
-      <p:sp>
-        <p:nvSpPr>
-          <p:cNvPr id="7" name="TextBox 6"/>
+              <a:t>Deployment options</a:t>
+            </a:r>
+          </a:p>
+        </p:txBody>
+      </p:sp>
+      <p:graphicFrame>
+        <p:nvGraphicFramePr>
+          <p:cNvPr id="7" name="Table 6"/>
+          <p:cNvGraphicFramePr>
+            <a:graphicFrameLocks noGrp="1"/>
+          </p:cNvGraphicFramePr>
+          <p:nvPr/>
+        </p:nvGraphicFramePr>
+        <p:xfrm>
+          <a:off x="365760" y="2331720"/>
+          <a:ext cx="5760720" cy="2377440"/>
+        </p:xfrm>
+        <a:graphic>
+          <a:graphicData uri="http://schemas.openxmlformats.org/drawingml/2006/table">
+            <a:tbl>
+              <a:tblPr firstRow="1" bandRow="1">
+                <a:tableStyleId>{5C22544A-7EE6-4342-B048-85BDC9FD1C3A}</a:tableStyleId>
+              </a:tblPr>
+              <a:tblGrid>
+                <a:gridCol w="2103120"/>
+                <a:gridCol w="2286000"/>
+                <a:gridCol w="1371600"/>
+              </a:tblGrid>
+              <a:tr h="594360">
+                <a:tc>
+                  <a:txBody>
+                    <a:bodyPr wrap="square"/>
+                    <a:lstStyle/>
+                    <a:p>
+                      <a:pPr algn="l"/>
+                      <a:r>
+                        <a:rPr sz="1100" b="1">
+                          <a:solidFill>
+                            <a:srgbClr val="FFFFFF"/>
+                          </a:solidFill>
+                          <a:latin typeface="Calibri"/>
+                        </a:rPr>
+                        <a:t>Option</a:t>
+                      </a:r>
+                    </a:p>
+                  </a:txBody>
+                  <a:tcPr marL="73152" marR="73152" marT="36576" marB="36576">
+                    <a:solidFill>
+                      <a:srgbClr val="1F4E79"/>
+                    </a:solidFill>
+                  </a:tcPr>
+                </a:tc>
+                <a:tc>
+                  <a:txBody>
+                    <a:bodyPr wrap="square"/>
+                    <a:lstStyle/>
+                    <a:p>
+                      <a:pPr algn="l"/>
+                      <a:r>
+                        <a:rPr sz="1100" b="1">
+                          <a:solidFill>
+                            <a:srgbClr val="FFFFFF"/>
+                          </a:solidFill>
+                          <a:latin typeface="Calibri"/>
+                        </a:rPr>
+                        <a:t>What it is</a:t>
+                      </a:r>
+                    </a:p>
+                  </a:txBody>
+                  <a:tcPr marL="73152" marR="73152" marT="36576" marB="36576">
+                    <a:solidFill>
+                      <a:srgbClr val="1F4E79"/>
+                    </a:solidFill>
+                  </a:tcPr>
+                </a:tc>
+                <a:tc>
+                  <a:txBody>
+                    <a:bodyPr wrap="square"/>
+                    <a:lstStyle/>
+                    <a:p>
+                      <a:pPr algn="l"/>
+                      <a:r>
+                        <a:rPr sz="1100" b="1">
+                          <a:solidFill>
+                            <a:srgbClr val="FFFFFF"/>
+                          </a:solidFill>
+                          <a:latin typeface="Calibri"/>
+                        </a:rPr>
+                        <a:t>When</a:t>
+                      </a:r>
+                    </a:p>
+                  </a:txBody>
+                  <a:tcPr marL="73152" marR="73152" marT="36576" marB="36576">
+                    <a:solidFill>
+                      <a:srgbClr val="1F4E79"/>
+                    </a:solidFill>
+                  </a:tcPr>
+                </a:tc>
+              </a:tr>
+              <a:tr h="594360">
+                <a:tc>
+                  <a:txBody>
+                    <a:bodyPr wrap="square"/>
+                    <a:lstStyle/>
+                    <a:p>
+                      <a:pPr algn="l"/>
+                      <a:r>
+                        <a:rPr sz="900" b="0">
+                          <a:solidFill>
+                            <a:srgbClr val="333333"/>
+                          </a:solidFill>
+                          <a:latin typeface="Calibri"/>
+                        </a:rPr>
+                        <a:t>Flex Gateway — Connected mode on-prem</a:t>
+                      </a:r>
+                    </a:p>
+                  </a:txBody>
+                  <a:tcPr marL="73152" marR="73152" marT="36576" marB="36576">
+                    <a:solidFill>
+                      <a:srgbClr val="FFFFFF"/>
+                    </a:solidFill>
+                  </a:tcPr>
+                </a:tc>
+                <a:tc>
+                  <a:txBody>
+                    <a:bodyPr wrap="square"/>
+                    <a:lstStyle/>
+                    <a:p>
+                      <a:pPr algn="l"/>
+                      <a:r>
+                        <a:rPr sz="900" b="0">
+                          <a:solidFill>
+                            <a:srgbClr val="333333"/>
+                          </a:solidFill>
+                          <a:latin typeface="Calibri"/>
+                        </a:rPr>
+                        <a:t>Runtime in your DC; control plane still SaaS (outbound HTTPS to anypoint.mulesoft.com only)</a:t>
+                      </a:r>
+                    </a:p>
+                  </a:txBody>
+                  <a:tcPr marL="73152" marR="73152" marT="36576" marB="36576">
+                    <a:solidFill>
+                      <a:srgbClr val="FFFFFF"/>
+                    </a:solidFill>
+                  </a:tcPr>
+                </a:tc>
+                <a:tc>
+                  <a:txBody>
+                    <a:bodyPr wrap="square"/>
+                    <a:lstStyle/>
+                    <a:p>
+                      <a:pPr algn="l"/>
+                      <a:r>
+                        <a:rPr sz="900" b="0">
+                          <a:solidFill>
+                            <a:srgbClr val="333333"/>
+                          </a:solidFill>
+                          <a:latin typeface="Calibri"/>
+                        </a:rPr>
+                        <a:t>You want central policy management but data plane on-prem</a:t>
+                      </a:r>
+                    </a:p>
+                  </a:txBody>
+                  <a:tcPr marL="73152" marR="73152" marT="36576" marB="36576">
+                    <a:solidFill>
+                      <a:srgbClr val="FFFFFF"/>
+                    </a:solidFill>
+                  </a:tcPr>
+                </a:tc>
+              </a:tr>
+              <a:tr h="594360">
+                <a:tc>
+                  <a:txBody>
+                    <a:bodyPr wrap="square"/>
+                    <a:lstStyle/>
+                    <a:p>
+                      <a:pPr algn="l"/>
+                      <a:r>
+                        <a:rPr sz="900" b="0">
+                          <a:solidFill>
+                            <a:srgbClr val="333333"/>
+                          </a:solidFill>
+                          <a:latin typeface="Calibri"/>
+                        </a:rPr>
+                        <a:t>Flex Gateway — Local mode</a:t>
+                      </a:r>
+                    </a:p>
+                  </a:txBody>
+                  <a:tcPr marL="73152" marR="73152" marT="36576" marB="36576">
+                    <a:solidFill>
+                      <a:srgbClr val="F2F2F2"/>
+                    </a:solidFill>
+                  </a:tcPr>
+                </a:tc>
+                <a:tc>
+                  <a:txBody>
+                    <a:bodyPr wrap="square"/>
+                    <a:lstStyle/>
+                    <a:p>
+                      <a:pPr algn="l"/>
+                      <a:r>
+                        <a:rPr sz="900" b="0">
+                          <a:solidFill>
+                            <a:srgbClr val="333333"/>
+                          </a:solidFill>
+                          <a:latin typeface="Calibri"/>
+                        </a:rPr>
+                        <a:t>Standalone — no Anypoint Platform connection; declarative config files only</a:t>
+                      </a:r>
+                    </a:p>
+                  </a:txBody>
+                  <a:tcPr marL="73152" marR="73152" marT="36576" marB="36576">
+                    <a:solidFill>
+                      <a:srgbClr val="F2F2F2"/>
+                    </a:solidFill>
+                  </a:tcPr>
+                </a:tc>
+                <a:tc>
+                  <a:txBody>
+                    <a:bodyPr wrap="square"/>
+                    <a:lstStyle/>
+                    <a:p>
+                      <a:pPr algn="l"/>
+                      <a:r>
+                        <a:rPr sz="900" b="0">
+                          <a:solidFill>
+                            <a:srgbClr val="333333"/>
+                          </a:solidFill>
+                          <a:latin typeface="Calibri"/>
+                        </a:rPr>
+                        <a:t>Fully air-gapped / sovereign; no outbound at all</a:t>
+                      </a:r>
+                    </a:p>
+                  </a:txBody>
+                  <a:tcPr marL="73152" marR="73152" marT="36576" marB="36576">
+                    <a:solidFill>
+                      <a:srgbClr val="F2F2F2"/>
+                    </a:solidFill>
+                  </a:tcPr>
+                </a:tc>
+              </a:tr>
+              <a:tr h="594360">
+                <a:tc>
+                  <a:txBody>
+                    <a:bodyPr wrap="square"/>
+                    <a:lstStyle/>
+                    <a:p>
+                      <a:pPr algn="l"/>
+                      <a:r>
+                        <a:rPr sz="900" b="0">
+                          <a:solidFill>
+                            <a:srgbClr val="333333"/>
+                          </a:solidFill>
+                          <a:latin typeface="Calibri"/>
+                        </a:rPr>
+                        <a:t>Mule Runtime on-prem (legacy)</a:t>
+                      </a:r>
+                    </a:p>
+                  </a:txBody>
+                  <a:tcPr marL="73152" marR="73152" marT="36576" marB="36576">
+                    <a:solidFill>
+                      <a:srgbClr val="FFFFFF"/>
+                    </a:solidFill>
+                  </a:tcPr>
+                </a:tc>
+                <a:tc>
+                  <a:txBody>
+                    <a:bodyPr wrap="square"/>
+                    <a:lstStyle/>
+                    <a:p>
+                      <a:pPr algn="l"/>
+                      <a:r>
+                        <a:rPr sz="900" b="0">
+                          <a:solidFill>
+                            <a:srgbClr val="333333"/>
+                          </a:solidFill>
+                          <a:latin typeface="Calibri"/>
+                        </a:rPr>
+                        <a:t>Full Mule runtime + API Manager Gateway plugin</a:t>
+                      </a:r>
+                    </a:p>
+                  </a:txBody>
+                  <a:tcPr marL="73152" marR="73152" marT="36576" marB="36576">
+                    <a:solidFill>
+                      <a:srgbClr val="FFFFFF"/>
+                    </a:solidFill>
+                  </a:tcPr>
+                </a:tc>
+                <a:tc>
+                  <a:txBody>
+                    <a:bodyPr wrap="square"/>
+                    <a:lstStyle/>
+                    <a:p>
+                      <a:pPr algn="l"/>
+                      <a:r>
+                        <a:rPr sz="900" b="0">
+                          <a:solidFill>
+                            <a:srgbClr val="333333"/>
+                          </a:solidFill>
+                          <a:latin typeface="Calibri"/>
+                        </a:rPr>
+                        <a:t>Only if you also need integration logic in-runtime</a:t>
+                      </a:r>
+                    </a:p>
+                  </a:txBody>
+                  <a:tcPr marL="73152" marR="73152" marT="36576" marB="36576">
+                    <a:solidFill>
+                      <a:srgbClr val="FFFFFF"/>
+                    </a:solidFill>
+                  </a:tcPr>
+                </a:tc>
+              </a:tr>
+            </a:tbl>
+          </a:graphicData>
+        </a:graphic>
+      </p:graphicFrame>
+      <p:sp>
+        <p:nvSpPr>
+          <p:cNvPr id="8" name="TextBox 7"/>
           <p:cNvSpPr txBox="1"/>
           <p:nvPr/>
         </p:nvSpPr>
         <p:spPr>
           <a:xfrm>
-            <a:off x="6400800" y="1417320"/>
-            <a:ext cx="5486400" cy="365760"/>
+            <a:off x="365760" y="4736592"/>
+            <a:ext cx="5760720" cy="365760"/>
           </a:xfrm>
           <a:prstGeom prst="rect">
             <a:avLst/>
@@ -10344,27 +11161,27 @@
           <a:p>
             <a:pPr algn="l"/>
             <a:r>
-              <a:rPr sz="1600" b="1">
+              <a:rPr sz="1000" b="0">
                 <a:solidFill>
-                  <a:srgbClr val="339933"/>
+                  <a:srgbClr val="333333"/>
                 </a:solidFill>
                 <a:latin typeface="Calibri"/>
               </a:rPr>
-              <a:t>Next steps</a:t>
-            </a:r>
-          </a:p>
-        </p:txBody>
-      </p:sp>
-      <p:sp>
-        <p:nvSpPr>
-          <p:cNvPr id="8" name="TextBox 7"/>
+              <a:t>Substrates: bare-metal Linux · RHEL VM · Docker · Kubernetes (OpenShift / Rancher / EKS-Anywhere). Multi-arch images (amd64 + arm64).</a:t>
+            </a:r>
+          </a:p>
+        </p:txBody>
+      </p:sp>
+      <p:sp>
+        <p:nvSpPr>
+          <p:cNvPr id="9" name="TextBox 8"/>
           <p:cNvSpPr txBox="1"/>
           <p:nvPr/>
         </p:nvSpPr>
         <p:spPr>
           <a:xfrm>
-            <a:off x="6400800" y="1783080"/>
-            <a:ext cx="5486400" cy="4572000"/>
+            <a:off x="6400800" y="2011680"/>
+            <a:ext cx="5486400" cy="320040"/>
           </a:xfrm>
           <a:prstGeom prst="rect">
             <a:avLst/>
@@ -10372,6 +11189,785 @@
           <a:noFill/>
         </p:spPr>
         <p:txBody>
+          <a:bodyPr wrap="square" lIns="45720" rIns="45720" tIns="18288" bIns="18288" anchor="t">
+            <a:spAutoFit/>
+          </a:bodyPr>
+          <a:lstStyle/>
+          <a:p>
+            <a:pPr algn="l"/>
+            <a:r>
+              <a:rPr sz="1400" b="1">
+                <a:solidFill>
+                  <a:srgbClr val="1F4E79"/>
+                </a:solidFill>
+                <a:latin typeface="Calibri"/>
+              </a:rPr>
+              <a:t>Operational ownership shift</a:t>
+            </a:r>
+          </a:p>
+        </p:txBody>
+      </p:sp>
+      <p:graphicFrame>
+        <p:nvGraphicFramePr>
+          <p:cNvPr id="10" name="Table 9"/>
+          <p:cNvGraphicFramePr>
+            <a:graphicFrameLocks noGrp="1"/>
+          </p:cNvGraphicFramePr>
+          <p:nvPr/>
+        </p:nvGraphicFramePr>
+        <p:xfrm>
+          <a:off x="6400800" y="2331720"/>
+          <a:ext cx="5486400" cy="2743200"/>
+        </p:xfrm>
+        <a:graphic>
+          <a:graphicData uri="http://schemas.openxmlformats.org/drawingml/2006/table">
+            <a:tbl>
+              <a:tblPr firstRow="1" bandRow="1">
+                <a:tableStyleId>{5C22544A-7EE6-4342-B048-85BDC9FD1C3A}</a:tableStyleId>
+              </a:tblPr>
+              <a:tblGrid>
+                <a:gridCol w="1828800"/>
+                <a:gridCol w="1828800"/>
+                <a:gridCol w="1828800"/>
+              </a:tblGrid>
+              <a:tr h="304800">
+                <a:tc>
+                  <a:txBody>
+                    <a:bodyPr wrap="square"/>
+                    <a:lstStyle/>
+                    <a:p>
+                      <a:pPr algn="l"/>
+                      <a:r>
+                        <a:rPr sz="1100" b="1">
+                          <a:solidFill>
+                            <a:srgbClr val="FFFFFF"/>
+                          </a:solidFill>
+                          <a:latin typeface="Calibri"/>
+                        </a:rPr>
+                        <a:t>Concern</a:t>
+                      </a:r>
+                    </a:p>
+                  </a:txBody>
+                  <a:tcPr marL="73152" marR="73152" marT="36576" marB="36576">
+                    <a:solidFill>
+                      <a:srgbClr val="1F4E79"/>
+                    </a:solidFill>
+                  </a:tcPr>
+                </a:tc>
+                <a:tc>
+                  <a:txBody>
+                    <a:bodyPr wrap="square"/>
+                    <a:lstStyle/>
+                    <a:p>
+                      <a:pPr algn="l"/>
+                      <a:r>
+                        <a:rPr sz="1100" b="1">
+                          <a:solidFill>
+                            <a:srgbClr val="FFFFFF"/>
+                          </a:solidFill>
+                          <a:latin typeface="Calibri"/>
+                        </a:rPr>
+                        <a:t>SaaS</a:t>
+                      </a:r>
+                    </a:p>
+                  </a:txBody>
+                  <a:tcPr marL="73152" marR="73152" marT="36576" marB="36576">
+                    <a:solidFill>
+                      <a:srgbClr val="1F4E79"/>
+                    </a:solidFill>
+                  </a:tcPr>
+                </a:tc>
+                <a:tc>
+                  <a:txBody>
+                    <a:bodyPr wrap="square"/>
+                    <a:lstStyle/>
+                    <a:p>
+                      <a:pPr algn="l"/>
+                      <a:r>
+                        <a:rPr sz="1100" b="1">
+                          <a:solidFill>
+                            <a:srgbClr val="FFFFFF"/>
+                          </a:solidFill>
+                          <a:latin typeface="Calibri"/>
+                        </a:rPr>
+                        <a:t>On-prem</a:t>
+                      </a:r>
+                    </a:p>
+                  </a:txBody>
+                  <a:tcPr marL="73152" marR="73152" marT="36576" marB="36576">
+                    <a:solidFill>
+                      <a:srgbClr val="1F4E79"/>
+                    </a:solidFill>
+                  </a:tcPr>
+                </a:tc>
+              </a:tr>
+              <a:tr h="304800">
+                <a:tc>
+                  <a:txBody>
+                    <a:bodyPr wrap="square"/>
+                    <a:lstStyle/>
+                    <a:p>
+                      <a:pPr algn="l"/>
+                      <a:r>
+                        <a:rPr sz="1000" b="0">
+                          <a:solidFill>
+                            <a:srgbClr val="333333"/>
+                          </a:solidFill>
+                          <a:latin typeface="Calibri"/>
+                        </a:rPr>
+                        <a:t>OS / patching</a:t>
+                      </a:r>
+                    </a:p>
+                  </a:txBody>
+                  <a:tcPr marL="73152" marR="73152" marT="36576" marB="36576">
+                    <a:solidFill>
+                      <a:srgbClr val="FFFFFF"/>
+                    </a:solidFill>
+                  </a:tcPr>
+                </a:tc>
+                <a:tc>
+                  <a:txBody>
+                    <a:bodyPr wrap="square"/>
+                    <a:lstStyle/>
+                    <a:p>
+                      <a:pPr algn="l"/>
+                      <a:r>
+                        <a:rPr sz="1000" b="0">
+                          <a:solidFill>
+                            <a:srgbClr val="333333"/>
+                          </a:solidFill>
+                          <a:latin typeface="Calibri"/>
+                        </a:rPr>
+                        <a:t>MuleSoft</a:t>
+                      </a:r>
+                    </a:p>
+                  </a:txBody>
+                  <a:tcPr marL="73152" marR="73152" marT="36576" marB="36576">
+                    <a:solidFill>
+                      <a:srgbClr val="FFFFFF"/>
+                    </a:solidFill>
+                  </a:tcPr>
+                </a:tc>
+                <a:tc>
+                  <a:txBody>
+                    <a:bodyPr wrap="square"/>
+                    <a:lstStyle/>
+                    <a:p>
+                      <a:pPr algn="l"/>
+                      <a:r>
+                        <a:rPr sz="1000" b="0">
+                          <a:solidFill>
+                            <a:srgbClr val="333333"/>
+                          </a:solidFill>
+                          <a:latin typeface="Calibri"/>
+                        </a:rPr>
+                        <a:t>You</a:t>
+                      </a:r>
+                    </a:p>
+                  </a:txBody>
+                  <a:tcPr marL="73152" marR="73152" marT="36576" marB="36576">
+                    <a:solidFill>
+                      <a:srgbClr val="FFFFFF"/>
+                    </a:solidFill>
+                  </a:tcPr>
+                </a:tc>
+              </a:tr>
+              <a:tr h="304800">
+                <a:tc>
+                  <a:txBody>
+                    <a:bodyPr wrap="square"/>
+                    <a:lstStyle/>
+                    <a:p>
+                      <a:pPr algn="l"/>
+                      <a:r>
+                        <a:rPr sz="1000" b="0">
+                          <a:solidFill>
+                            <a:srgbClr val="333333"/>
+                          </a:solidFill>
+                          <a:latin typeface="Calibri"/>
+                        </a:rPr>
+                        <a:t>Runtime upgrades</a:t>
+                      </a:r>
+                    </a:p>
+                  </a:txBody>
+                  <a:tcPr marL="73152" marR="73152" marT="36576" marB="36576">
+                    <a:solidFill>
+                      <a:srgbClr val="F2F2F2"/>
+                    </a:solidFill>
+                  </a:tcPr>
+                </a:tc>
+                <a:tc>
+                  <a:txBody>
+                    <a:bodyPr wrap="square"/>
+                    <a:lstStyle/>
+                    <a:p>
+                      <a:pPr algn="l"/>
+                      <a:r>
+                        <a:rPr sz="1000" b="0">
+                          <a:solidFill>
+                            <a:srgbClr val="333333"/>
+                          </a:solidFill>
+                          <a:latin typeface="Calibri"/>
+                        </a:rPr>
+                        <a:t>MuleSoft</a:t>
+                      </a:r>
+                    </a:p>
+                  </a:txBody>
+                  <a:tcPr marL="73152" marR="73152" marT="36576" marB="36576">
+                    <a:solidFill>
+                      <a:srgbClr val="F2F2F2"/>
+                    </a:solidFill>
+                  </a:tcPr>
+                </a:tc>
+                <a:tc>
+                  <a:txBody>
+                    <a:bodyPr wrap="square"/>
+                    <a:lstStyle/>
+                    <a:p>
+                      <a:pPr algn="l"/>
+                      <a:r>
+                        <a:rPr sz="1000" b="0">
+                          <a:solidFill>
+                            <a:srgbClr val="333333"/>
+                          </a:solidFill>
+                          <a:latin typeface="Calibri"/>
+                        </a:rPr>
+                        <a:t>You</a:t>
+                      </a:r>
+                    </a:p>
+                  </a:txBody>
+                  <a:tcPr marL="73152" marR="73152" marT="36576" marB="36576">
+                    <a:solidFill>
+                      <a:srgbClr val="F2F2F2"/>
+                    </a:solidFill>
+                  </a:tcPr>
+                </a:tc>
+              </a:tr>
+              <a:tr h="304800">
+                <a:tc>
+                  <a:txBody>
+                    <a:bodyPr wrap="square"/>
+                    <a:lstStyle/>
+                    <a:p>
+                      <a:pPr algn="l"/>
+                      <a:r>
+                        <a:rPr sz="1000" b="0">
+                          <a:solidFill>
+                            <a:srgbClr val="333333"/>
+                          </a:solidFill>
+                          <a:latin typeface="Calibri"/>
+                        </a:rPr>
+                        <a:t>HA setup</a:t>
+                      </a:r>
+                    </a:p>
+                  </a:txBody>
+                  <a:tcPr marL="73152" marR="73152" marT="36576" marB="36576">
+                    <a:solidFill>
+                      <a:srgbClr val="FFFFFF"/>
+                    </a:solidFill>
+                  </a:tcPr>
+                </a:tc>
+                <a:tc>
+                  <a:txBody>
+                    <a:bodyPr wrap="square"/>
+                    <a:lstStyle/>
+                    <a:p>
+                      <a:pPr algn="l"/>
+                      <a:r>
+                        <a:rPr sz="1000" b="0">
+                          <a:solidFill>
+                            <a:srgbClr val="333333"/>
+                          </a:solidFill>
+                          <a:latin typeface="Calibri"/>
+                        </a:rPr>
+                        <a:t>Built-in multi-AZ</a:t>
+                      </a:r>
+                    </a:p>
+                  </a:txBody>
+                  <a:tcPr marL="73152" marR="73152" marT="36576" marB="36576">
+                    <a:solidFill>
+                      <a:srgbClr val="FFFFFF"/>
+                    </a:solidFill>
+                  </a:tcPr>
+                </a:tc>
+                <a:tc>
+                  <a:txBody>
+                    <a:bodyPr wrap="square"/>
+                    <a:lstStyle/>
+                    <a:p>
+                      <a:pPr algn="l"/>
+                      <a:r>
+                        <a:rPr sz="1000" b="0">
+                          <a:solidFill>
+                            <a:srgbClr val="333333"/>
+                          </a:solidFill>
+                          <a:latin typeface="Calibri"/>
+                        </a:rPr>
+                        <a:t>Active/active across DCs — you build</a:t>
+                      </a:r>
+                    </a:p>
+                  </a:txBody>
+                  <a:tcPr marL="73152" marR="73152" marT="36576" marB="36576">
+                    <a:solidFill>
+                      <a:srgbClr val="FFFFFF"/>
+                    </a:solidFill>
+                  </a:tcPr>
+                </a:tc>
+              </a:tr>
+              <a:tr h="304800">
+                <a:tc>
+                  <a:txBody>
+                    <a:bodyPr wrap="square"/>
+                    <a:lstStyle/>
+                    <a:p>
+                      <a:pPr algn="l"/>
+                      <a:r>
+                        <a:rPr sz="1000" b="0">
+                          <a:solidFill>
+                            <a:srgbClr val="333333"/>
+                          </a:solidFill>
+                          <a:latin typeface="Calibri"/>
+                        </a:rPr>
+                        <a:t>Capacity planning</a:t>
+                      </a:r>
+                    </a:p>
+                  </a:txBody>
+                  <a:tcPr marL="73152" marR="73152" marT="36576" marB="36576">
+                    <a:solidFill>
+                      <a:srgbClr val="F2F2F2"/>
+                    </a:solidFill>
+                  </a:tcPr>
+                </a:tc>
+                <a:tc>
+                  <a:txBody>
+                    <a:bodyPr wrap="square"/>
+                    <a:lstStyle/>
+                    <a:p>
+                      <a:pPr algn="l"/>
+                      <a:r>
+                        <a:rPr sz="1000" b="0">
+                          <a:solidFill>
+                            <a:srgbClr val="333333"/>
+                          </a:solidFill>
+                          <a:latin typeface="Calibri"/>
+                        </a:rPr>
+                        <a:t>Auto-scale</a:t>
+                      </a:r>
+                    </a:p>
+                  </a:txBody>
+                  <a:tcPr marL="73152" marR="73152" marT="36576" marB="36576">
+                    <a:solidFill>
+                      <a:srgbClr val="F2F2F2"/>
+                    </a:solidFill>
+                  </a:tcPr>
+                </a:tc>
+                <a:tc>
+                  <a:txBody>
+                    <a:bodyPr wrap="square"/>
+                    <a:lstStyle/>
+                    <a:p>
+                      <a:pPr algn="l"/>
+                      <a:r>
+                        <a:rPr sz="1000" b="0">
+                          <a:solidFill>
+                            <a:srgbClr val="333333"/>
+                          </a:solidFill>
+                          <a:latin typeface="Calibri"/>
+                        </a:rPr>
+                        <a:t>You provision for peak</a:t>
+                      </a:r>
+                    </a:p>
+                  </a:txBody>
+                  <a:tcPr marL="73152" marR="73152" marT="36576" marB="36576">
+                    <a:solidFill>
+                      <a:srgbClr val="F2F2F2"/>
+                    </a:solidFill>
+                  </a:tcPr>
+                </a:tc>
+              </a:tr>
+              <a:tr h="304800">
+                <a:tc>
+                  <a:txBody>
+                    <a:bodyPr wrap="square"/>
+                    <a:lstStyle/>
+                    <a:p>
+                      <a:pPr algn="l"/>
+                      <a:r>
+                        <a:rPr sz="1000" b="0">
+                          <a:solidFill>
+                            <a:srgbClr val="333333"/>
+                          </a:solidFill>
+                          <a:latin typeface="Calibri"/>
+                        </a:rPr>
+                        <a:t>Monitoring</a:t>
+                      </a:r>
+                    </a:p>
+                  </a:txBody>
+                  <a:tcPr marL="73152" marR="73152" marT="36576" marB="36576">
+                    <a:solidFill>
+                      <a:srgbClr val="FFFFFF"/>
+                    </a:solidFill>
+                  </a:tcPr>
+                </a:tc>
+                <a:tc>
+                  <a:txBody>
+                    <a:bodyPr wrap="square"/>
+                    <a:lstStyle/>
+                    <a:p>
+                      <a:pPr algn="l"/>
+                      <a:r>
+                        <a:rPr sz="1000" b="0">
+                          <a:solidFill>
+                            <a:srgbClr val="333333"/>
+                          </a:solidFill>
+                          <a:latin typeface="Calibri"/>
+                        </a:rPr>
+                        <a:t>Anypoint Monitoring built-in</a:t>
+                      </a:r>
+                    </a:p>
+                  </a:txBody>
+                  <a:tcPr marL="73152" marR="73152" marT="36576" marB="36576">
+                    <a:solidFill>
+                      <a:srgbClr val="FFFFFF"/>
+                    </a:solidFill>
+                  </a:tcPr>
+                </a:tc>
+                <a:tc>
+                  <a:txBody>
+                    <a:bodyPr wrap="square"/>
+                    <a:lstStyle/>
+                    <a:p>
+                      <a:pPr algn="l"/>
+                      <a:r>
+                        <a:rPr sz="1000" b="0">
+                          <a:solidFill>
+                            <a:srgbClr val="333333"/>
+                          </a:solidFill>
+                          <a:latin typeface="Calibri"/>
+                        </a:rPr>
+                        <a:t>Your SOC + tooling</a:t>
+                      </a:r>
+                    </a:p>
+                  </a:txBody>
+                  <a:tcPr marL="73152" marR="73152" marT="36576" marB="36576">
+                    <a:solidFill>
+                      <a:srgbClr val="FFFFFF"/>
+                    </a:solidFill>
+                  </a:tcPr>
+                </a:tc>
+              </a:tr>
+              <a:tr h="304800">
+                <a:tc>
+                  <a:txBody>
+                    <a:bodyPr wrap="square"/>
+                    <a:lstStyle/>
+                    <a:p>
+                      <a:pPr algn="l"/>
+                      <a:r>
+                        <a:rPr sz="1000" b="0">
+                          <a:solidFill>
+                            <a:srgbClr val="333333"/>
+                          </a:solidFill>
+                          <a:latin typeface="Calibri"/>
+                        </a:rPr>
+                        <a:t>Personnel access to runtime</a:t>
+                      </a:r>
+                    </a:p>
+                  </a:txBody>
+                  <a:tcPr marL="73152" marR="73152" marT="36576" marB="36576">
+                    <a:solidFill>
+                      <a:srgbClr val="F2F2F2"/>
+                    </a:solidFill>
+                  </a:tcPr>
+                </a:tc>
+                <a:tc>
+                  <a:txBody>
+                    <a:bodyPr wrap="square"/>
+                    <a:lstStyle/>
+                    <a:p>
+                      <a:pPr algn="l"/>
+                      <a:r>
+                        <a:rPr sz="1000" b="0">
+                          <a:solidFill>
+                            <a:srgbClr val="333333"/>
+                          </a:solidFill>
+                          <a:latin typeface="Calibri"/>
+                        </a:rPr>
+                        <a:t>MuleSoft (contractual)</a:t>
+                      </a:r>
+                    </a:p>
+                  </a:txBody>
+                  <a:tcPr marL="73152" marR="73152" marT="36576" marB="36576">
+                    <a:solidFill>
+                      <a:srgbClr val="F2F2F2"/>
+                    </a:solidFill>
+                  </a:tcPr>
+                </a:tc>
+                <a:tc>
+                  <a:txBody>
+                    <a:bodyPr wrap="square"/>
+                    <a:lstStyle/>
+                    <a:p>
+                      <a:pPr algn="l"/>
+                      <a:r>
+                        <a:rPr sz="1000" b="0">
+                          <a:solidFill>
+                            <a:srgbClr val="333333"/>
+                          </a:solidFill>
+                          <a:latin typeface="Calibri"/>
+                        </a:rPr>
+                        <a:t>You only</a:t>
+                      </a:r>
+                    </a:p>
+                  </a:txBody>
+                  <a:tcPr marL="73152" marR="73152" marT="36576" marB="36576">
+                    <a:solidFill>
+                      <a:srgbClr val="F2F2F2"/>
+                    </a:solidFill>
+                  </a:tcPr>
+                </a:tc>
+              </a:tr>
+              <a:tr h="304800">
+                <a:tc>
+                  <a:txBody>
+                    <a:bodyPr wrap="square"/>
+                    <a:lstStyle/>
+                    <a:p>
+                      <a:pPr algn="l"/>
+                      <a:r>
+                        <a:rPr sz="1000" b="0">
+                          <a:solidFill>
+                            <a:srgbClr val="333333"/>
+                          </a:solidFill>
+                          <a:latin typeface="Calibri"/>
+                        </a:rPr>
+                        <a:t>Compliance audit posture</a:t>
+                      </a:r>
+                    </a:p>
+                  </a:txBody>
+                  <a:tcPr marL="73152" marR="73152" marT="36576" marB="36576">
+                    <a:solidFill>
+                      <a:srgbClr val="FFFFFF"/>
+                    </a:solidFill>
+                  </a:tcPr>
+                </a:tc>
+                <a:tc>
+                  <a:txBody>
+                    <a:bodyPr wrap="square"/>
+                    <a:lstStyle/>
+                    <a:p>
+                      <a:pPr algn="l"/>
+                      <a:r>
+                        <a:rPr sz="1000" b="0">
+                          <a:solidFill>
+                            <a:srgbClr val="333333"/>
+                          </a:solidFill>
+                          <a:latin typeface="Calibri"/>
+                        </a:rPr>
+                        <a:t>Inherited (SOC 2, FedRAMP Mod)</a:t>
+                      </a:r>
+                    </a:p>
+                  </a:txBody>
+                  <a:tcPr marL="73152" marR="73152" marT="36576" marB="36576">
+                    <a:solidFill>
+                      <a:srgbClr val="FFFFFF"/>
+                    </a:solidFill>
+                  </a:tcPr>
+                </a:tc>
+                <a:tc>
+                  <a:txBody>
+                    <a:bodyPr wrap="square"/>
+                    <a:lstStyle/>
+                    <a:p>
+                      <a:pPr algn="l"/>
+                      <a:r>
+                        <a:rPr sz="1000" b="0">
+                          <a:solidFill>
+                            <a:srgbClr val="333333"/>
+                          </a:solidFill>
+                          <a:latin typeface="Calibri"/>
+                        </a:rPr>
+                        <a:t>Yours to maintain</a:t>
+                      </a:r>
+                    </a:p>
+                  </a:txBody>
+                  <a:tcPr marL="73152" marR="73152" marT="36576" marB="36576">
+                    <a:solidFill>
+                      <a:srgbClr val="FFFFFF"/>
+                    </a:solidFill>
+                  </a:tcPr>
+                </a:tc>
+              </a:tr>
+              <a:tr h="304800">
+                <a:tc>
+                  <a:txBody>
+                    <a:bodyPr wrap="square"/>
+                    <a:lstStyle/>
+                    <a:p>
+                      <a:pPr algn="l"/>
+                      <a:r>
+                        <a:rPr sz="1000" b="0">
+                          <a:solidFill>
+                            <a:srgbClr val="333333"/>
+                          </a:solidFill>
+                          <a:latin typeface="Calibri"/>
+                        </a:rPr>
+                        <a:t>Release-window downtime</a:t>
+                      </a:r>
+                    </a:p>
+                  </a:txBody>
+                  <a:tcPr marL="73152" marR="73152" marT="36576" marB="36576">
+                    <a:solidFill>
+                      <a:srgbClr val="F2F2F2"/>
+                    </a:solidFill>
+                  </a:tcPr>
+                </a:tc>
+                <a:tc>
+                  <a:txBody>
+                    <a:bodyPr wrap="square"/>
+                    <a:lstStyle/>
+                    <a:p>
+                      <a:pPr algn="l"/>
+                      <a:r>
+                        <a:rPr sz="1000" b="0">
+                          <a:solidFill>
+                            <a:srgbClr val="333333"/>
+                          </a:solidFill>
+                          <a:latin typeface="Calibri"/>
+                        </a:rPr>
+                        <a:t>Rolling, transparent</a:t>
+                      </a:r>
+                    </a:p>
+                  </a:txBody>
+                  <a:tcPr marL="73152" marR="73152" marT="36576" marB="36576">
+                    <a:solidFill>
+                      <a:srgbClr val="F2F2F2"/>
+                    </a:solidFill>
+                  </a:tcPr>
+                </a:tc>
+                <a:tc>
+                  <a:txBody>
+                    <a:bodyPr wrap="square"/>
+                    <a:lstStyle/>
+                    <a:p>
+                      <a:pPr algn="l"/>
+                      <a:r>
+                        <a:rPr sz="1000" b="0">
+                          <a:solidFill>
+                            <a:srgbClr val="333333"/>
+                          </a:solidFill>
+                          <a:latin typeface="Calibri"/>
+                        </a:rPr>
+                        <a:t>Your change window</a:t>
+                      </a:r>
+                    </a:p>
+                  </a:txBody>
+                  <a:tcPr marL="73152" marR="73152" marT="36576" marB="36576">
+                    <a:solidFill>
+                      <a:srgbClr val="F2F2F2"/>
+                    </a:solidFill>
+                  </a:tcPr>
+                </a:tc>
+              </a:tr>
+            </a:tbl>
+          </a:graphicData>
+        </a:graphic>
+      </p:graphicFrame>
+      <p:sp>
+        <p:nvSpPr>
+          <p:cNvPr id="11" name="Rectangle 10"/>
+          <p:cNvSpPr/>
+          <p:nvPr/>
+        </p:nvSpPr>
+        <p:spPr>
+          <a:xfrm>
+            <a:off x="365760" y="5212080"/>
+            <a:ext cx="11521440" cy="1280160"/>
+          </a:xfrm>
+          <a:prstGeom prst="rect">
+            <a:avLst/>
+          </a:prstGeom>
+          <a:solidFill>
+            <a:srgbClr val="DEEBF7"/>
+          </a:solidFill>
+          <a:ln>
+            <a:noFill/>
+          </a:ln>
+        </p:spPr>
+        <p:style>
+          <a:lnRef idx="1">
+            <a:schemeClr val="accent1"/>
+          </a:lnRef>
+          <a:fillRef idx="3">
+            <a:schemeClr val="accent1"/>
+          </a:fillRef>
+          <a:effectRef idx="2">
+            <a:schemeClr val="accent1"/>
+          </a:effectRef>
+          <a:fontRef idx="minor">
+            <a:schemeClr val="lt1"/>
+          </a:fontRef>
+        </p:style>
+        <p:txBody>
+          <a:bodyPr rtlCol="0" anchor="ctr"/>
+          <a:lstStyle/>
+          <a:p>
+            <a:pPr algn="ctr"/>
+          </a:p>
+        </p:txBody>
+      </p:sp>
+      <p:sp>
+        <p:nvSpPr>
+          <p:cNvPr id="12" name="TextBox 11"/>
+          <p:cNvSpPr txBox="1"/>
+          <p:nvPr/>
+        </p:nvSpPr>
+        <p:spPr>
+          <a:xfrm>
+            <a:off x="502920" y="5285232"/>
+            <a:ext cx="7315200" cy="320040"/>
+          </a:xfrm>
+          <a:prstGeom prst="rect">
+            <a:avLst/>
+          </a:prstGeom>
+          <a:noFill/>
+        </p:spPr>
+        <p:txBody>
+          <a:bodyPr wrap="square" lIns="45720" rIns="45720" tIns="18288" bIns="18288" anchor="t">
+            <a:spAutoFit/>
+          </a:bodyPr>
+          <a:lstStyle/>
+          <a:p>
+            <a:pPr algn="l"/>
+            <a:r>
+              <a:rPr sz="1400" b="1">
+                <a:solidFill>
+                  <a:srgbClr val="1F4E79"/>
+                </a:solidFill>
+                <a:latin typeface="Calibri"/>
+              </a:rPr>
+              <a:t>When to choose on-prem over SaaS</a:t>
+            </a:r>
+          </a:p>
+        </p:txBody>
+      </p:sp>
+      <p:sp>
+        <p:nvSpPr>
+          <p:cNvPr id="13" name="TextBox 12"/>
+          <p:cNvSpPr txBox="1"/>
+          <p:nvPr/>
+        </p:nvSpPr>
+        <p:spPr>
+          <a:xfrm>
+            <a:off x="502920" y="5596128"/>
+            <a:ext cx="11338560" cy="914400"/>
+          </a:xfrm>
+          <a:prstGeom prst="rect">
+            <a:avLst/>
+          </a:prstGeom>
+          <a:noFill/>
+        </p:spPr>
+        <p:txBody>
           <a:bodyPr wrap="square" lIns="45720" rIns="45720">
             <a:spAutoFit/>
           </a:bodyPr>
@@ -10379,141 +11975,103 @@
           <a:p>
             <a:pPr algn="l">
               <a:lnSpc>
-                <a:spcPct val="115000"/>
+                <a:spcPct val="110000"/>
               </a:lnSpc>
               <a:spcAft>
                 <a:spcPts val="400"/>
               </a:spcAft>
             </a:pPr>
             <a:r>
-              <a:rPr sz="1200">
+              <a:rPr sz="1000">
                 <a:solidFill>
                   <a:srgbClr val="333333"/>
                 </a:solidFill>
                 <a:latin typeface="Calibri"/>
               </a:rPr>
-              <a:t>•  Engage MuleSoft account team — confirm centralus Private Space GA, feature matrix, pricing for our scale.</a:t>
+              <a:t>•  Regulatory regime mandates on-prem (some sovereign-cloud regimes, classified, certain healthcare jurisdictions)</a:t>
             </a:r>
           </a:p>
           <a:p>
             <a:pPr algn="l">
               <a:lnSpc>
-                <a:spcPct val="115000"/>
+                <a:spcPct val="110000"/>
               </a:lnSpc>
               <a:spcAft>
                 <a:spcPts val="400"/>
               </a:spcAft>
             </a:pPr>
             <a:r>
-              <a:rPr sz="1200">
+              <a:rPr sz="1000">
                 <a:solidFill>
                   <a:srgbClr val="333333"/>
                 </a:solidFill>
                 <a:latin typeface="Calibri"/>
               </a:rPr>
-              <a:t>•  Open DPA / BAA conversation immediately — these are slow.</a:t>
+              <a:t>•  Your risk appetite cannot accept ANY MuleSoft personnel privileged access to runtime — even contractually constrained</a:t>
             </a:r>
           </a:p>
           <a:p>
             <a:pPr algn="l">
               <a:lnSpc>
-                <a:spcPct val="115000"/>
+                <a:spcPct val="110000"/>
               </a:lnSpc>
               <a:spcAft>
                 <a:spcPts val="400"/>
               </a:spcAft>
             </a:pPr>
             <a:r>
-              <a:rPr sz="1200">
+              <a:rPr sz="1000">
                 <a:solidFill>
                   <a:srgbClr val="333333"/>
                 </a:solidFill>
                 <a:latin typeface="Calibri"/>
               </a:rPr>
-              <a:t>•  Pre-go-live security checklist (doc 07 §12) as tabletop with CISO / DPO.</a:t>
+              <a:t>•  You already operate a hardened on-prem PII platform (HSM, dedicated SOC, DLP, SIEM) — adding the gateway is incremental</a:t>
             </a:r>
           </a:p>
           <a:p>
             <a:pPr algn="l">
               <a:lnSpc>
-                <a:spcPct val="115000"/>
+                <a:spcPct val="110000"/>
               </a:lnSpc>
               <a:spcAft>
                 <a:spcPts val="400"/>
               </a:spcAft>
             </a:pPr>
             <a:r>
-              <a:rPr sz="1200">
+              <a:rPr sz="1000">
                 <a:solidFill>
                   <a:srgbClr val="333333"/>
                 </a:solidFill>
                 <a:latin typeface="Calibri"/>
               </a:rPr>
-              <a:t>•  Define IdP-side configuration with the IAM team — clients, scopes, claim shape.</a:t>
+              <a:t>•  Sustained volume &gt; 5–10M calls/day where amortized on-prem hardware undercuts the SaaS license model</a:t>
             </a:r>
           </a:p>
           <a:p>
             <a:pPr algn="l">
               <a:lnSpc>
-                <a:spcPct val="115000"/>
+                <a:spcPct val="110000"/>
               </a:lnSpc>
               <a:spcAft>
                 <a:spcPts val="400"/>
               </a:spcAft>
             </a:pPr>
             <a:r>
-              <a:rPr sz="1200">
+              <a:rPr sz="1000">
                 <a:solidFill>
                   <a:srgbClr val="333333"/>
                 </a:solidFill>
                 <a:latin typeface="Calibri"/>
               </a:rPr>
-              <a:t>•  Network team starts the ExpressRoute / Transit Gateway change request — 2–3 week lead time.</a:t>
-            </a:r>
-          </a:p>
-          <a:p>
-            <a:pPr algn="l">
-              <a:lnSpc>
-                <a:spcPct val="115000"/>
-              </a:lnSpc>
-              <a:spcAft>
-                <a:spcPts val="400"/>
-              </a:spcAft>
-            </a:pPr>
-            <a:r>
-              <a:rPr sz="1200">
-                <a:solidFill>
-                  <a:srgbClr val="333333"/>
-                </a:solidFill>
-                <a:latin typeface="Calibri"/>
-              </a:rPr>
-              <a:t>•  Stand up POC in a dev Private Space; validate one API end-to-end including private connectivity, mTLS, JWT.</a:t>
-            </a:r>
-          </a:p>
-          <a:p>
-            <a:pPr algn="l">
-              <a:lnSpc>
-                <a:spcPct val="115000"/>
-              </a:lnSpc>
-              <a:spcAft>
-                <a:spcPts val="400"/>
-              </a:spcAft>
-            </a:pPr>
-            <a:r>
-              <a:rPr sz="1200">
-                <a:solidFill>
-                  <a:srgbClr val="333333"/>
-                </a:solidFill>
-                <a:latin typeface="Calibri"/>
-              </a:rPr>
-              <a:t>•  Decide observability stack (Splunk + Datadog) and provision private endpoints into the Private Space.</a:t>
-            </a:r>
-          </a:p>
-        </p:txBody>
-      </p:sp>
-      <p:sp>
-        <p:nvSpPr>
-          <p:cNvPr id="9" name="Rectangle 8"/>
+              <a:t>•  True air-gap operation required — no outbound connection to anypoint.mulesoft.com is permitted (forces Local mode)</a:t>
+            </a:r>
+          </a:p>
+        </p:txBody>
+      </p:sp>
+      <p:sp>
+        <p:nvSpPr>
+          <p:cNvPr id="14" name="Rectangle 13"/>
           <p:cNvSpPr/>
           <p:nvPr/>
         </p:nvSpPr>
@@ -10556,7 +12114,7 @@
       </p:sp>
       <p:sp>
         <p:nvSpPr>
-          <p:cNvPr id="10" name="TextBox 9"/>
+          <p:cNvPr id="15" name="TextBox 14"/>
           <p:cNvSpPr txBox="1"/>
           <p:nvPr/>
         </p:nvSpPr>
@@ -10591,7 +12149,7 @@
       </p:sp>
       <p:sp>
         <p:nvSpPr>
-          <p:cNvPr id="11" name="TextBox 10"/>
+          <p:cNvPr id="16" name="TextBox 15"/>
           <p:cNvSpPr txBox="1"/>
           <p:nvPr/>
         </p:nvSpPr>
@@ -10619,7 +12177,7 @@
                 </a:solidFill>
                 <a:latin typeface="Calibri"/>
               </a:rPr>
-              <a:t>9 / 9</a:t>
+              <a:t>9 / 10</a:t>
             </a:r>
           </a:p>
         </p:txBody>

--- a/presentations/MuleSoft-APIGateway-Architecture.pptx
+++ b/presentations/MuleSoft-APIGateway-Architecture.pptx
@@ -7961,7 +7961,7 @@
                 </a:solidFill>
                 <a:latin typeface="Calibri"/>
               </a:rPr>
-              <a:t>Capacity planning — 100K calls/day</a:t>
+              <a:t>Capacity planning — 5M calls/day</a:t>
             </a:r>
           </a:p>
         </p:txBody>
@@ -7996,7 +7996,7 @@
                 </a:solidFill>
                 <a:latin typeface="Calibri"/>
               </a:rPr>
-              <a:t>Traffic math, replica sizing, headroom, and indicative cost</a:t>
+              <a:t>Traffic math, replica sizing, headroom, and indicative Prod cost</a:t>
             </a:r>
           </a:p>
         </p:txBody>
@@ -8143,7 +8143,7 @@
                           </a:solidFill>
                           <a:latin typeface="Calibri"/>
                         </a:rPr>
-                        <a:t>100,000 calls</a:t>
+                        <a:t>5,000,000 calls</a:t>
                       </a:r>
                     </a:p>
                   </a:txBody>
@@ -8191,7 +8191,7 @@
                           </a:solidFill>
                           <a:latin typeface="Calibri"/>
                         </a:rPr>
-                        <a:t>~1.16</a:t>
+                        <a:t>~58</a:t>
                       </a:r>
                     </a:p>
                   </a:txBody>
@@ -8216,7 +8216,7 @@
                           </a:solidFill>
                           <a:latin typeface="Calibri"/>
                         </a:rPr>
-                        <a:t>Business-hours avg TPS (8h concentration)</a:t>
+                        <a:t>Business-hours avg TPS (8h, 70% concentration)</a:t>
                       </a:r>
                     </a:p>
                   </a:txBody>
@@ -8239,7 +8239,7 @@
                           </a:solidFill>
                           <a:latin typeface="Calibri"/>
                         </a:rPr>
-                        <a:t>~3.5</a:t>
+                        <a:t>~120</a:t>
                       </a:r>
                     </a:p>
                   </a:txBody>
@@ -8287,7 +8287,7 @@
                           </a:solidFill>
                           <a:latin typeface="Calibri"/>
                         </a:rPr>
-                        <a:t>~17</a:t>
+                        <a:t>~600</a:t>
                       </a:r>
                     </a:p>
                   </a:txBody>
@@ -8335,7 +8335,7 @@
                           </a:solidFill>
                           <a:latin typeface="Calibri"/>
                         </a:rPr>
-                        <a:t>~35</a:t>
+                        <a:t>~1,200</a:t>
                       </a:r>
                     </a:p>
                   </a:txBody>
@@ -8360,7 +8360,7 @@
                           </a:solidFill>
                           <a:latin typeface="Calibri"/>
                         </a:rPr>
-                        <a:t>Headroom over peak with recommended config</a:t>
+                        <a:t>Headroom over spike with recommended config</a:t>
                       </a:r>
                     </a:p>
                   </a:txBody>
@@ -8383,7 +8383,7 @@
                           </a:solidFill>
                           <a:latin typeface="Calibri"/>
                         </a:rPr>
-                        <a:t>≈ 10×</a:t>
+                        <a:t>≈ 2×</a:t>
                       </a:r>
                     </a:p>
                   </a:txBody>
@@ -8428,7 +8428,7 @@
                 </a:solidFill>
                 <a:latin typeface="Calibri"/>
               </a:rPr>
-              <a:t>Recommended configuration</a:t>
+              <a:t>Recommended Prod configuration</a:t>
             </a:r>
           </a:p>
         </p:txBody>
@@ -8540,7 +8540,7 @@
                           </a:solidFill>
                           <a:latin typeface="Calibri"/>
                         </a:rPr>
-                        <a:t>0.1 vCore per replica</a:t>
+                        <a:t>0.2 vCore per replica</a:t>
                       </a:r>
                     </a:p>
                   </a:txBody>
@@ -8588,7 +8588,7 @@
                           </a:solidFill>
                           <a:latin typeface="Calibri"/>
                         </a:rPr>
-                        <a:t>2 (multi-AZ)</a:t>
+                        <a:t>4 (multi-AZ)</a:t>
                       </a:r>
                     </a:p>
                   </a:txBody>
@@ -8636,7 +8636,7 @@
                           </a:solidFill>
                           <a:latin typeface="Calibri"/>
                         </a:rPr>
-                        <a:t>Enabled — min 2 / max 4</a:t>
+                        <a:t>Enabled — min 4 / max 8</a:t>
                       </a:r>
                     </a:p>
                   </a:txBody>
@@ -8684,7 +8684,7 @@
                           </a:solidFill>
                           <a:latin typeface="Calibri"/>
                         </a:rPr>
-                        <a:t>CPU &gt; 60% over 5 min</a:t>
+                        <a:t>CPU &gt; 55% over 5 min</a:t>
                       </a:r>
                     </a:p>
                   </a:txBody>
@@ -8828,7 +8828,7 @@
                           </a:solidFill>
                           <a:latin typeface="Calibri"/>
                         </a:rPr>
-                        <a:t>Standard</a:t>
+                        <a:t>Titanium</a:t>
                       </a:r>
                     </a:p>
                   </a:txBody>
@@ -8916,7 +8916,7 @@
                 </a:solidFill>
                 <a:latin typeface="Calibri"/>
               </a:rPr>
-              <a:t>Indicative monthly cost (list pricing)</a:t>
+              <a:t>Indicative monthly cost — Prod only (list pricing)</a:t>
             </a:r>
           </a:p>
         </p:txBody>
@@ -9005,7 +9005,7 @@
                           </a:solidFill>
                           <a:latin typeface="Calibri"/>
                         </a:rPr>
-                        <a:t>2× Flex Gateway replicas @ 0.1 vCore</a:t>
+                        <a:t>4× Flex Gateway replicas @ 0.2 vCore</a:t>
                       </a:r>
                     </a:p>
                   </a:txBody>
@@ -9028,7 +9028,7 @@
                           </a:solidFill>
                           <a:latin typeface="Calibri"/>
                         </a:rPr>
-                        <a:t>$400 – $800</a:t>
+                        <a:t>$1,600 – $3,200</a:t>
                       </a:r>
                     </a:p>
                   </a:txBody>
@@ -9149,7 +9149,7 @@
                           </a:solidFill>
                           <a:latin typeface="Calibri"/>
                         </a:rPr>
-                        <a:t>Anypoint Monitoring (Standard)</a:t>
+                        <a:t>Anypoint Monitoring (Titanium)</a:t>
                       </a:r>
                     </a:p>
                   </a:txBody>
@@ -9172,7 +9172,7 @@
                           </a:solidFill>
                           <a:latin typeface="Calibri"/>
                         </a:rPr>
-                        <a:t>$200 – $500</a:t>
+                        <a:t>$800 – $1,500</a:t>
                       </a:r>
                     </a:p>
                   </a:txBody>
@@ -9197,7 +9197,7 @@
                           </a:solidFill>
                           <a:latin typeface="Calibri"/>
                         </a:rPr>
-                        <a:t>Data transfer (low at this volume)</a:t>
+                        <a:t>Data transfer (5M/day, ~5 KB avg)</a:t>
                       </a:r>
                     </a:p>
                   </a:txBody>
@@ -9220,7 +9220,7 @@
                           </a:solidFill>
                           <a:latin typeface="Calibri"/>
                         </a:rPr>
-                        <a:t>~$50</a:t>
+                        <a:t>~$250</a:t>
                       </a:r>
                     </a:p>
                   </a:txBody>
@@ -9245,7 +9245,7 @@
                           </a:solidFill>
                           <a:latin typeface="Calibri"/>
                         </a:rPr>
-                        <a:t>Total (list, gateway-tier only)</a:t>
+                        <a:t>Total (list, Prod gateway-tier only)</a:t>
                       </a:r>
                     </a:p>
                   </a:txBody>
@@ -9268,7 +9268,7 @@
                           </a:solidFill>
                           <a:latin typeface="Calibri"/>
                         </a:rPr>
-                        <a:t>≈ $2,400 – $4,600 / mo</a:t>
+                        <a:t>≈ $4,400 – $8,200 / mo</a:t>
                       </a:r>
                     </a:p>
                   </a:txBody>
@@ -9313,7 +9313,7 @@
                 </a:solidFill>
                 <a:latin typeface="Calibri"/>
               </a:rPr>
-              <a:t>Note: list price is the ceiling; enterprise discount typically reduces by 30–50%. ExpressRoute / Direct Connect costs are absorbed by existing network OpEx.</a:t>
+              <a:t>Note: 4 environments (DEV / QA / Acceptance / Prod) with QA mirroring Prod for load testing roughly doubles gateway compute spend. List price is the ceiling; enterprise discount typically reduces by 30–50%.</a:t>
             </a:r>
           </a:p>
         </p:txBody>
